--- a/Final Presentaion.pptx
+++ b/Final Presentaion.pptx
@@ -126,7 +126,7 @@
 <p1510:revInfo xmlns:a="http://schemas.openxmlformats.org/drawingml/2006/main" xmlns:r="http://schemas.openxmlformats.org/officeDocument/2006/relationships" xmlns:p1510="http://schemas.microsoft.com/office/powerpoint/2015/10/main">
   <p1510:revLst>
     <p1510:client id="{3B973D2C-B445-4D4F-8285-7813DFC89A13}" v="602" dt="2026-04-21T11:22:05.510"/>
-    <p1510:client id="{488E703F-2AAE-4CA2-9D7F-913A7868A261}" v="1" dt="2026-04-22T08:01:33.764"/>
+    <p1510:client id="{488E703F-2AAE-4CA2-9D7F-913A7868A261}" v="7" dt="2026-04-22T08:07:32.383"/>
     <p1510:client id="{C80B5902-B20A-473D-9BB6-CCCB6DBB60AA}" v="1702" dt="2026-04-21T18:55:11.639"/>
     <p1510:client id="{F0DC17BF-4D7D-4315-BDDB-5A0CB81CCDB1}" v="535" dt="2026-04-22T07:58:59.635"/>
   </p1510:revLst>
@@ -22876,36 +22876,6 @@
           </a:prstGeom>
         </p:spPr>
       </p:pic>
-      <p:pic>
-        <p:nvPicPr>
-          <p:cNvPr id="5" name="Picture 4" descr="A black and white drawing of a person&#10;&#10;AI-generated content may be incorrect.">
-            <a:extLst>
-              <a:ext uri="{FF2B5EF4-FFF2-40B4-BE49-F238E27FC236}">
-                <a16:creationId xmlns:a16="http://schemas.microsoft.com/office/drawing/2014/main" id="{8CC82440-A3DF-4D27-908A-1DC7102F0366}"/>
-              </a:ext>
-            </a:extLst>
-          </p:cNvPr>
-          <p:cNvPicPr>
-            <a:picLocks noChangeAspect="1"/>
-          </p:cNvPicPr>
-          <p:nvPr/>
-        </p:nvPicPr>
-        <p:blipFill>
-          <a:blip r:embed="rId3"/>
-          <a:stretch>
-            <a:fillRect/>
-          </a:stretch>
-        </p:blipFill>
-        <p:spPr>
-          <a:xfrm>
-            <a:off x="6889297" y="1711778"/>
-            <a:ext cx="4148818" cy="4121604"/>
-          </a:xfrm>
-          <a:prstGeom prst="rect">
-            <a:avLst/>
-          </a:prstGeom>
-        </p:spPr>
-      </p:pic>
       <p:sp>
         <p:nvSpPr>
           <p:cNvPr id="6" name="TextBox 5">
@@ -23010,6 +22980,36 @@
           </a:p>
         </p:txBody>
       </p:sp>
+      <p:pic>
+        <p:nvPicPr>
+          <p:cNvPr id="3" name="Picture 2" descr="A black and white drawing of a person&#10;&#10;AI-generated content may be incorrect.">
+            <a:extLst>
+              <a:ext uri="{FF2B5EF4-FFF2-40B4-BE49-F238E27FC236}">
+                <a16:creationId xmlns:a16="http://schemas.microsoft.com/office/drawing/2014/main" id="{53CE9931-33D0-1E70-C55D-AD1663CD0DC0}"/>
+              </a:ext>
+            </a:extLst>
+          </p:cNvPr>
+          <p:cNvPicPr>
+            <a:picLocks noChangeAspect="1"/>
+          </p:cNvPicPr>
+          <p:nvPr/>
+        </p:nvPicPr>
+        <p:blipFill>
+          <a:blip r:embed="rId3"/>
+          <a:stretch>
+            <a:fillRect/>
+          </a:stretch>
+        </p:blipFill>
+        <p:spPr>
+          <a:xfrm>
+            <a:off x="7001521" y="1715609"/>
+            <a:ext cx="4136995" cy="4122199"/>
+          </a:xfrm>
+          <a:prstGeom prst="rect">
+            <a:avLst/>
+          </a:prstGeom>
+        </p:spPr>
+      </p:pic>
     </p:spTree>
     <p:extLst>
       <p:ext uri="{BB962C8B-B14F-4D97-AF65-F5344CB8AC3E}">
